--- a/m4/diapositivos/sessao-11-m4-f14.pptx
+++ b/m4/diapositivos/sessao-11-m4-f14.pptx
@@ -4760,7 +4760,41 @@
                 <a:ea typeface="Georgia" pitchFamily="34" charset="-122"/>
                 <a:cs typeface="Georgia" pitchFamily="34" charset="-120"/>
               </a:rPr>
-              <a:t>Um grupo ficou fechado num abrigo durante trinta dias. Há comida, água e espaço, mas não há regras. Cada um tem dois minutos para propor ao grupo a regra mais importante da comunidade e convencê-lo a aprová-la. No fim, vota-se. (Sem pessoas reais; nenhuma proposta pode excluir ou humilhar alguém.)</a:t>
+              <a:t>Um grupo ficou fechado num abrigo durante trinta dias. Há comida, água e espaço, mas não há regras. Cada um tem </a:t>
+            </a:r>
+            <a:pPr indent="0" marL="0">
+              <a:lnSpc>
+                <a:spcPct val="120000"/>
+              </a:lnSpc>
+              <a:buNone/>
+            </a:pPr>
+            <a:r>
+              <a:rPr lang="en-US" sz="2300" b="1" dirty="0">
+                <a:solidFill>
+                  <a:srgbClr val="F2F0EA"/>
+                </a:solidFill>
+                <a:latin typeface="Georgia" pitchFamily="34" charset="0"/>
+                <a:ea typeface="Georgia" pitchFamily="34" charset="-122"/>
+                <a:cs typeface="Georgia" pitchFamily="34" charset="-120"/>
+              </a:rPr>
+              <a:t>dois minutos</a:t>
+            </a:r>
+            <a:pPr indent="0" marL="0">
+              <a:lnSpc>
+                <a:spcPct val="120000"/>
+              </a:lnSpc>
+              <a:buNone/>
+            </a:pPr>
+            <a:r>
+              <a:rPr lang="en-US" sz="2300" dirty="0">
+                <a:solidFill>
+                  <a:srgbClr val="F2F0EA"/>
+                </a:solidFill>
+                <a:latin typeface="Georgia" pitchFamily="34" charset="0"/>
+                <a:ea typeface="Georgia" pitchFamily="34" charset="-122"/>
+                <a:cs typeface="Georgia" pitchFamily="34" charset="-120"/>
+              </a:rPr>
+              <a:t> para propor ao grupo a regra mais importante da comunidade e convencê-lo a aprová-la. No fim, vota-se. (Sem pessoas reais; nenhuma proposta pode excluir ou humilhar alguém.)</a:t>
             </a:r>
             <a:endParaRPr lang="en-US" sz="2300" dirty="0"/>
           </a:p>
